--- a/21-dars - Elektron jadval listlari va fayllar orasidagi aloqalar. Nisbiy va absolyut murojaatlar/21-dars - Slayd.pptx
+++ b/21-dars - Elektron jadval listlari va fayllar orasidagi aloqalar. Nisbiy va absolyut murojaatlar/21-dars - Slayd.pptx
@@ -4280,7 +4280,7 @@
                 <a:ea typeface="Calibri" pitchFamily="34" charset="-122"/>
                 <a:cs typeface="Calibri" pitchFamily="34" charset="-120"/>
               </a:rPr>
-              <a:t>Yangi listда yillik yakun jadvalini tuz.</a:t>
+              <a:t>Yangi listda yillik yakun jadvalini tuz.</a:t>
             </a:r>
             <a:endParaRPr lang="en-US" sz="1350" dirty="0"/>
           </a:p>
@@ -4482,7 +4482,7 @@
                 <a:ea typeface="Calibri" pitchFamily="34" charset="-122"/>
                 <a:cs typeface="Calibri" pitchFamily="34" charset="-120"/>
               </a:rPr>
-              <a:t>Soliq foizini bitta katakka yozib, unга absolyut murojaat ($) bilan bog'la.</a:t>
+              <a:t>Soliq foizini bitta katakka yozib, unga absolyut murojaat ($) bilan bog'la.</a:t>
             </a:r>
             <a:endParaRPr lang="en-US" sz="1350" dirty="0"/>
           </a:p>
